--- a/04_presentations/01_powerpoint/06_Jeroen.pptx
+++ b/04_presentations/01_powerpoint/06_Jeroen.pptx
@@ -7,6 +7,7 @@
   <p:sldIdLst>
     <p:sldId id="256" r:id="rId2"/>
     <p:sldId id="257" r:id="rId3"/>
+    <p:sldId id="258" r:id="rId4"/>
   </p:sldIdLst>
   <p:sldSz cx="12192000" cy="6858000"/>
   <p:notesSz cx="6858000" cy="9144000"/>
@@ -105,6 +106,11 @@
       </a:defRPr>
     </a:lvl9pPr>
   </p:defaultTextStyle>
+  <p:extLst>
+    <p:ext uri="{EFAFB233-063F-42B5-8137-9DF3F51BA10A}">
+      <p15:sldGuideLst xmlns:p15="http://schemas.microsoft.com/office/powerpoint/2012/main"/>
+    </p:ext>
+  </p:extLst>
 </p:presentation>
 </file>
 
@@ -255,7 +261,7 @@
           <a:p>
             <a:fld id="{2642D604-5A06-4222-909A-95995939C497}" type="datetimeFigureOut">
               <a:rPr lang="en-US" smtClean="0"/>
-              <a:t>3/27/2026</a:t>
+              <a:t>3/31/2026</a:t>
             </a:fld>
             <a:endParaRPr lang="en-US"/>
           </a:p>
@@ -453,7 +459,7 @@
           <a:p>
             <a:fld id="{2642D604-5A06-4222-909A-95995939C497}" type="datetimeFigureOut">
               <a:rPr lang="en-US" smtClean="0"/>
-              <a:t>3/27/2026</a:t>
+              <a:t>3/31/2026</a:t>
             </a:fld>
             <a:endParaRPr lang="en-US"/>
           </a:p>
@@ -661,7 +667,7 @@
           <a:p>
             <a:fld id="{2642D604-5A06-4222-909A-95995939C497}" type="datetimeFigureOut">
               <a:rPr lang="en-US" smtClean="0"/>
-              <a:t>3/27/2026</a:t>
+              <a:t>3/31/2026</a:t>
             </a:fld>
             <a:endParaRPr lang="en-US"/>
           </a:p>
@@ -859,7 +865,7 @@
           <a:p>
             <a:fld id="{2642D604-5A06-4222-909A-95995939C497}" type="datetimeFigureOut">
               <a:rPr lang="en-US" smtClean="0"/>
-              <a:t>3/27/2026</a:t>
+              <a:t>3/31/2026</a:t>
             </a:fld>
             <a:endParaRPr lang="en-US"/>
           </a:p>
@@ -1134,7 +1140,7 @@
           <a:p>
             <a:fld id="{2642D604-5A06-4222-909A-95995939C497}" type="datetimeFigureOut">
               <a:rPr lang="en-US" smtClean="0"/>
-              <a:t>3/27/2026</a:t>
+              <a:t>3/31/2026</a:t>
             </a:fld>
             <a:endParaRPr lang="en-US"/>
           </a:p>
@@ -1399,7 +1405,7 @@
           <a:p>
             <a:fld id="{2642D604-5A06-4222-909A-95995939C497}" type="datetimeFigureOut">
               <a:rPr lang="en-US" smtClean="0"/>
-              <a:t>3/27/2026</a:t>
+              <a:t>3/31/2026</a:t>
             </a:fld>
             <a:endParaRPr lang="en-US"/>
           </a:p>
@@ -1811,7 +1817,7 @@
           <a:p>
             <a:fld id="{2642D604-5A06-4222-909A-95995939C497}" type="datetimeFigureOut">
               <a:rPr lang="en-US" smtClean="0"/>
-              <a:t>3/27/2026</a:t>
+              <a:t>3/31/2026</a:t>
             </a:fld>
             <a:endParaRPr lang="en-US"/>
           </a:p>
@@ -1952,7 +1958,7 @@
           <a:p>
             <a:fld id="{2642D604-5A06-4222-909A-95995939C497}" type="datetimeFigureOut">
               <a:rPr lang="en-US" smtClean="0"/>
-              <a:t>3/27/2026</a:t>
+              <a:t>3/31/2026</a:t>
             </a:fld>
             <a:endParaRPr lang="en-US"/>
           </a:p>
@@ -2065,7 +2071,7 @@
           <a:p>
             <a:fld id="{2642D604-5A06-4222-909A-95995939C497}" type="datetimeFigureOut">
               <a:rPr lang="en-US" smtClean="0"/>
-              <a:t>3/27/2026</a:t>
+              <a:t>3/31/2026</a:t>
             </a:fld>
             <a:endParaRPr lang="en-US"/>
           </a:p>
@@ -2376,7 +2382,7 @@
           <a:p>
             <a:fld id="{2642D604-5A06-4222-909A-95995939C497}" type="datetimeFigureOut">
               <a:rPr lang="en-US" smtClean="0"/>
-              <a:t>3/27/2026</a:t>
+              <a:t>3/31/2026</a:t>
             </a:fld>
             <a:endParaRPr lang="en-US"/>
           </a:p>
@@ -2664,7 +2670,7 @@
           <a:p>
             <a:fld id="{2642D604-5A06-4222-909A-95995939C497}" type="datetimeFigureOut">
               <a:rPr lang="en-US" smtClean="0"/>
-              <a:t>3/27/2026</a:t>
+              <a:t>3/31/2026</a:t>
             </a:fld>
             <a:endParaRPr lang="en-US"/>
           </a:p>
@@ -2905,7 +2911,7 @@
           <a:p>
             <a:fld id="{2642D604-5A06-4222-909A-95995939C497}" type="datetimeFigureOut">
               <a:rPr lang="en-US" smtClean="0"/>
-              <a:t>3/27/2026</a:t>
+              <a:t>3/31/2026</a:t>
             </a:fld>
             <a:endParaRPr lang="en-US"/>
           </a:p>
@@ -3499,6 +3505,101 @@
     <p:extLst>
       <p:ext uri="{BB962C8B-B14F-4D97-AF65-F5344CB8AC3E}">
         <p14:creationId xmlns:p14="http://schemas.microsoft.com/office/powerpoint/2010/main" val="2115130472"/>
+      </p:ext>
+    </p:extLst>
+  </p:cSld>
+  <p:clrMapOvr>
+    <a:masterClrMapping/>
+  </p:clrMapOvr>
+</p:sld>
+</file>
+
+<file path=ppt/slides/slide3.xml><?xml version="1.0" encoding="utf-8"?>
+<p:sld xmlns:a="http://schemas.openxmlformats.org/drawingml/2006/main" xmlns:r="http://schemas.openxmlformats.org/officeDocument/2006/relationships" xmlns:p="http://schemas.openxmlformats.org/presentationml/2006/main">
+  <p:cSld>
+    <p:spTree>
+      <p:nvGrpSpPr>
+        <p:cNvPr id="1" name=""/>
+        <p:cNvGrpSpPr/>
+        <p:nvPr/>
+      </p:nvGrpSpPr>
+      <p:grpSpPr>
+        <a:xfrm>
+          <a:off x="0" y="0"/>
+          <a:ext cx="0" cy="0"/>
+          <a:chOff x="0" y="0"/>
+          <a:chExt cx="0" cy="0"/>
+        </a:xfrm>
+      </p:grpSpPr>
+      <p:sp>
+        <p:nvSpPr>
+          <p:cNvPr id="2" name="Title 1">
+            <a:extLst>
+              <a:ext uri="{FF2B5EF4-FFF2-40B4-BE49-F238E27FC236}">
+                <a16:creationId xmlns:a16="http://schemas.microsoft.com/office/drawing/2014/main" id="{B9D99121-B034-B613-40B0-AE64936E0576}"/>
+              </a:ext>
+            </a:extLst>
+          </p:cNvPr>
+          <p:cNvSpPr>
+            <a:spLocks noGrp="1"/>
+          </p:cNvSpPr>
+          <p:nvPr>
+            <p:ph type="title"/>
+          </p:nvPr>
+        </p:nvSpPr>
+        <p:spPr/>
+        <p:txBody>
+          <a:bodyPr/>
+          <a:lstStyle/>
+          <a:p>
+            <a:r>
+              <a:rPr lang="en-US" dirty="0"/>
+              <a:t>Effect </a:t>
+            </a:r>
+            <a:r>
+              <a:rPr lang="en-US"/>
+              <a:t>of burn-in</a:t>
+            </a:r>
+            <a:endParaRPr lang="en-US" dirty="0"/>
+          </a:p>
+        </p:txBody>
+      </p:sp>
+      <p:pic>
+        <p:nvPicPr>
+          <p:cNvPr id="5" name="Content Placeholder 4">
+            <a:extLst>
+              <a:ext uri="{FF2B5EF4-FFF2-40B4-BE49-F238E27FC236}">
+                <a16:creationId xmlns:a16="http://schemas.microsoft.com/office/drawing/2014/main" id="{5D3B0A32-4B26-15F2-D960-605C2E07C962}"/>
+              </a:ext>
+            </a:extLst>
+          </p:cNvPr>
+          <p:cNvPicPr>
+            <a:picLocks noGrp="1" noChangeAspect="1"/>
+          </p:cNvPicPr>
+          <p:nvPr>
+            <p:ph idx="1"/>
+          </p:nvPr>
+        </p:nvPicPr>
+        <p:blipFill>
+          <a:blip r:embed="rId2"/>
+          <a:stretch>
+            <a:fillRect/>
+          </a:stretch>
+        </p:blipFill>
+        <p:spPr>
+          <a:xfrm>
+            <a:off x="838200" y="1690688"/>
+            <a:ext cx="7823138" cy="4969994"/>
+          </a:xfrm>
+          <a:prstGeom prst="rect">
+            <a:avLst/>
+          </a:prstGeom>
+        </p:spPr>
+      </p:pic>
+    </p:spTree>
+    <p:extLst>
+      <p:ext uri="{BB962C8B-B14F-4D97-AF65-F5344CB8AC3E}">
+        <p14:creationId xmlns:p14="http://schemas.microsoft.com/office/powerpoint/2010/main" val="3068104984"/>
       </p:ext>
     </p:extLst>
   </p:cSld>

--- a/04_presentations/01_powerpoint/06_Jeroen.pptx
+++ b/04_presentations/01_powerpoint/06_Jeroen.pptx
@@ -8,6 +8,7 @@
     <p:sldId id="256" r:id="rId2"/>
     <p:sldId id="257" r:id="rId3"/>
     <p:sldId id="258" r:id="rId4"/>
+    <p:sldId id="259" r:id="rId5"/>
   </p:sldIdLst>
   <p:sldSz cx="12192000" cy="6858000"/>
   <p:notesSz cx="6858000" cy="9144000"/>
@@ -261,7 +262,7 @@
           <a:p>
             <a:fld id="{2642D604-5A06-4222-909A-95995939C497}" type="datetimeFigureOut">
               <a:rPr lang="en-US" smtClean="0"/>
-              <a:t>3/31/2026</a:t>
+              <a:t>4/2/2026</a:t>
             </a:fld>
             <a:endParaRPr lang="en-US"/>
           </a:p>
@@ -459,7 +460,7 @@
           <a:p>
             <a:fld id="{2642D604-5A06-4222-909A-95995939C497}" type="datetimeFigureOut">
               <a:rPr lang="en-US" smtClean="0"/>
-              <a:t>3/31/2026</a:t>
+              <a:t>4/2/2026</a:t>
             </a:fld>
             <a:endParaRPr lang="en-US"/>
           </a:p>
@@ -667,7 +668,7 @@
           <a:p>
             <a:fld id="{2642D604-5A06-4222-909A-95995939C497}" type="datetimeFigureOut">
               <a:rPr lang="en-US" smtClean="0"/>
-              <a:t>3/31/2026</a:t>
+              <a:t>4/2/2026</a:t>
             </a:fld>
             <a:endParaRPr lang="en-US"/>
           </a:p>
@@ -865,7 +866,7 @@
           <a:p>
             <a:fld id="{2642D604-5A06-4222-909A-95995939C497}" type="datetimeFigureOut">
               <a:rPr lang="en-US" smtClean="0"/>
-              <a:t>3/31/2026</a:t>
+              <a:t>4/2/2026</a:t>
             </a:fld>
             <a:endParaRPr lang="en-US"/>
           </a:p>
@@ -1140,7 +1141,7 @@
           <a:p>
             <a:fld id="{2642D604-5A06-4222-909A-95995939C497}" type="datetimeFigureOut">
               <a:rPr lang="en-US" smtClean="0"/>
-              <a:t>3/31/2026</a:t>
+              <a:t>4/2/2026</a:t>
             </a:fld>
             <a:endParaRPr lang="en-US"/>
           </a:p>
@@ -1405,7 +1406,7 @@
           <a:p>
             <a:fld id="{2642D604-5A06-4222-909A-95995939C497}" type="datetimeFigureOut">
               <a:rPr lang="en-US" smtClean="0"/>
-              <a:t>3/31/2026</a:t>
+              <a:t>4/2/2026</a:t>
             </a:fld>
             <a:endParaRPr lang="en-US"/>
           </a:p>
@@ -1817,7 +1818,7 @@
           <a:p>
             <a:fld id="{2642D604-5A06-4222-909A-95995939C497}" type="datetimeFigureOut">
               <a:rPr lang="en-US" smtClean="0"/>
-              <a:t>3/31/2026</a:t>
+              <a:t>4/2/2026</a:t>
             </a:fld>
             <a:endParaRPr lang="en-US"/>
           </a:p>
@@ -1958,7 +1959,7 @@
           <a:p>
             <a:fld id="{2642D604-5A06-4222-909A-95995939C497}" type="datetimeFigureOut">
               <a:rPr lang="en-US" smtClean="0"/>
-              <a:t>3/31/2026</a:t>
+              <a:t>4/2/2026</a:t>
             </a:fld>
             <a:endParaRPr lang="en-US"/>
           </a:p>
@@ -2071,7 +2072,7 @@
           <a:p>
             <a:fld id="{2642D604-5A06-4222-909A-95995939C497}" type="datetimeFigureOut">
               <a:rPr lang="en-US" smtClean="0"/>
-              <a:t>3/31/2026</a:t>
+              <a:t>4/2/2026</a:t>
             </a:fld>
             <a:endParaRPr lang="en-US"/>
           </a:p>
@@ -2382,7 +2383,7 @@
           <a:p>
             <a:fld id="{2642D604-5A06-4222-909A-95995939C497}" type="datetimeFigureOut">
               <a:rPr lang="en-US" smtClean="0"/>
-              <a:t>3/31/2026</a:t>
+              <a:t>4/2/2026</a:t>
             </a:fld>
             <a:endParaRPr lang="en-US"/>
           </a:p>
@@ -2670,7 +2671,7 @@
           <a:p>
             <a:fld id="{2642D604-5A06-4222-909A-95995939C497}" type="datetimeFigureOut">
               <a:rPr lang="en-US" smtClean="0"/>
-              <a:t>3/31/2026</a:t>
+              <a:t>4/2/2026</a:t>
             </a:fld>
             <a:endParaRPr lang="en-US"/>
           </a:p>
@@ -2911,7 +2912,7 @@
           <a:p>
             <a:fld id="{2642D604-5A06-4222-909A-95995939C497}" type="datetimeFigureOut">
               <a:rPr lang="en-US" smtClean="0"/>
-              <a:t>3/31/2026</a:t>
+              <a:t>4/2/2026</a:t>
             </a:fld>
             <a:endParaRPr lang="en-US"/>
           </a:p>
@@ -3600,6 +3601,96 @@
     <p:extLst>
       <p:ext uri="{BB962C8B-B14F-4D97-AF65-F5344CB8AC3E}">
         <p14:creationId xmlns:p14="http://schemas.microsoft.com/office/powerpoint/2010/main" val="3068104984"/>
+      </p:ext>
+    </p:extLst>
+  </p:cSld>
+  <p:clrMapOvr>
+    <a:masterClrMapping/>
+  </p:clrMapOvr>
+</p:sld>
+</file>
+
+<file path=ppt/slides/slide4.xml><?xml version="1.0" encoding="utf-8"?>
+<p:sld xmlns:a="http://schemas.openxmlformats.org/drawingml/2006/main" xmlns:r="http://schemas.openxmlformats.org/officeDocument/2006/relationships" xmlns:p="http://schemas.openxmlformats.org/presentationml/2006/main">
+  <p:cSld>
+    <p:spTree>
+      <p:nvGrpSpPr>
+        <p:cNvPr id="1" name=""/>
+        <p:cNvGrpSpPr/>
+        <p:nvPr/>
+      </p:nvGrpSpPr>
+      <p:grpSpPr>
+        <a:xfrm>
+          <a:off x="0" y="0"/>
+          <a:ext cx="0" cy="0"/>
+          <a:chOff x="0" y="0"/>
+          <a:chExt cx="0" cy="0"/>
+        </a:xfrm>
+      </p:grpSpPr>
+      <p:sp>
+        <p:nvSpPr>
+          <p:cNvPr id="2" name="Title 1">
+            <a:extLst>
+              <a:ext uri="{FF2B5EF4-FFF2-40B4-BE49-F238E27FC236}">
+                <a16:creationId xmlns:a16="http://schemas.microsoft.com/office/drawing/2014/main" id="{ABA88813-3034-3734-425B-24F77F90265E}"/>
+              </a:ext>
+            </a:extLst>
+          </p:cNvPr>
+          <p:cNvSpPr>
+            <a:spLocks noGrp="1"/>
+          </p:cNvSpPr>
+          <p:nvPr>
+            <p:ph type="title"/>
+          </p:nvPr>
+        </p:nvSpPr>
+        <p:spPr/>
+        <p:txBody>
+          <a:bodyPr/>
+          <a:lstStyle/>
+          <a:p>
+            <a:r>
+              <a:rPr lang="en-US" dirty="0"/>
+              <a:t>RICLPM Burn-in 50 vs 20</a:t>
+            </a:r>
+          </a:p>
+        </p:txBody>
+      </p:sp>
+      <p:pic>
+        <p:nvPicPr>
+          <p:cNvPr id="5" name="Content Placeholder 4">
+            <a:extLst>
+              <a:ext uri="{FF2B5EF4-FFF2-40B4-BE49-F238E27FC236}">
+                <a16:creationId xmlns:a16="http://schemas.microsoft.com/office/drawing/2014/main" id="{D765DE8A-00CA-25B1-A10B-F66313116A49}"/>
+              </a:ext>
+            </a:extLst>
+          </p:cNvPr>
+          <p:cNvPicPr>
+            <a:picLocks noGrp="1" noChangeAspect="1"/>
+          </p:cNvPicPr>
+          <p:nvPr>
+            <p:ph idx="1"/>
+          </p:nvPr>
+        </p:nvPicPr>
+        <p:blipFill>
+          <a:blip r:embed="rId2"/>
+          <a:stretch>
+            <a:fillRect/>
+          </a:stretch>
+        </p:blipFill>
+        <p:spPr>
+          <a:xfrm>
+            <a:off x="838200" y="2125452"/>
+            <a:ext cx="5071889" cy="3137182"/>
+          </a:xfrm>
+          <a:prstGeom prst="rect">
+            <a:avLst/>
+          </a:prstGeom>
+        </p:spPr>
+      </p:pic>
+    </p:spTree>
+    <p:extLst>
+      <p:ext uri="{BB962C8B-B14F-4D97-AF65-F5344CB8AC3E}">
+        <p14:creationId xmlns:p14="http://schemas.microsoft.com/office/powerpoint/2010/main" val="3150729735"/>
       </p:ext>
     </p:extLst>
   </p:cSld>

--- a/04_presentations/01_powerpoint/06_Jeroen.pptx
+++ b/04_presentations/01_powerpoint/06_Jeroen.pptx
@@ -7,8 +7,13 @@
   <p:sldIdLst>
     <p:sldId id="256" r:id="rId2"/>
     <p:sldId id="257" r:id="rId3"/>
-    <p:sldId id="258" r:id="rId4"/>
-    <p:sldId id="259" r:id="rId5"/>
+    <p:sldId id="262" r:id="rId4"/>
+    <p:sldId id="263" r:id="rId5"/>
+    <p:sldId id="260" r:id="rId6"/>
+    <p:sldId id="261" r:id="rId7"/>
+    <p:sldId id="264" r:id="rId8"/>
+    <p:sldId id="258" r:id="rId9"/>
+    <p:sldId id="259" r:id="rId10"/>
   </p:sldIdLst>
   <p:sldSz cx="12192000" cy="6858000"/>
   <p:notesSz cx="6858000" cy="9144000"/>
@@ -262,7 +267,7 @@
           <a:p>
             <a:fld id="{2642D604-5A06-4222-909A-95995939C497}" type="datetimeFigureOut">
               <a:rPr lang="en-US" smtClean="0"/>
-              <a:t>4/2/2026</a:t>
+              <a:t>4/3/2026</a:t>
             </a:fld>
             <a:endParaRPr lang="en-US"/>
           </a:p>
@@ -460,7 +465,7 @@
           <a:p>
             <a:fld id="{2642D604-5A06-4222-909A-95995939C497}" type="datetimeFigureOut">
               <a:rPr lang="en-US" smtClean="0"/>
-              <a:t>4/2/2026</a:t>
+              <a:t>4/3/2026</a:t>
             </a:fld>
             <a:endParaRPr lang="en-US"/>
           </a:p>
@@ -668,7 +673,7 @@
           <a:p>
             <a:fld id="{2642D604-5A06-4222-909A-95995939C497}" type="datetimeFigureOut">
               <a:rPr lang="en-US" smtClean="0"/>
-              <a:t>4/2/2026</a:t>
+              <a:t>4/3/2026</a:t>
             </a:fld>
             <a:endParaRPr lang="en-US"/>
           </a:p>
@@ -866,7 +871,7 @@
           <a:p>
             <a:fld id="{2642D604-5A06-4222-909A-95995939C497}" type="datetimeFigureOut">
               <a:rPr lang="en-US" smtClean="0"/>
-              <a:t>4/2/2026</a:t>
+              <a:t>4/3/2026</a:t>
             </a:fld>
             <a:endParaRPr lang="en-US"/>
           </a:p>
@@ -1141,7 +1146,7 @@
           <a:p>
             <a:fld id="{2642D604-5A06-4222-909A-95995939C497}" type="datetimeFigureOut">
               <a:rPr lang="en-US" smtClean="0"/>
-              <a:t>4/2/2026</a:t>
+              <a:t>4/3/2026</a:t>
             </a:fld>
             <a:endParaRPr lang="en-US"/>
           </a:p>
@@ -1406,7 +1411,7 @@
           <a:p>
             <a:fld id="{2642D604-5A06-4222-909A-95995939C497}" type="datetimeFigureOut">
               <a:rPr lang="en-US" smtClean="0"/>
-              <a:t>4/2/2026</a:t>
+              <a:t>4/3/2026</a:t>
             </a:fld>
             <a:endParaRPr lang="en-US"/>
           </a:p>
@@ -1818,7 +1823,7 @@
           <a:p>
             <a:fld id="{2642D604-5A06-4222-909A-95995939C497}" type="datetimeFigureOut">
               <a:rPr lang="en-US" smtClean="0"/>
-              <a:t>4/2/2026</a:t>
+              <a:t>4/3/2026</a:t>
             </a:fld>
             <a:endParaRPr lang="en-US"/>
           </a:p>
@@ -1959,7 +1964,7 @@
           <a:p>
             <a:fld id="{2642D604-5A06-4222-909A-95995939C497}" type="datetimeFigureOut">
               <a:rPr lang="en-US" smtClean="0"/>
-              <a:t>4/2/2026</a:t>
+              <a:t>4/3/2026</a:t>
             </a:fld>
             <a:endParaRPr lang="en-US"/>
           </a:p>
@@ -2072,7 +2077,7 @@
           <a:p>
             <a:fld id="{2642D604-5A06-4222-909A-95995939C497}" type="datetimeFigureOut">
               <a:rPr lang="en-US" smtClean="0"/>
-              <a:t>4/2/2026</a:t>
+              <a:t>4/3/2026</a:t>
             </a:fld>
             <a:endParaRPr lang="en-US"/>
           </a:p>
@@ -2383,7 +2388,7 @@
           <a:p>
             <a:fld id="{2642D604-5A06-4222-909A-95995939C497}" type="datetimeFigureOut">
               <a:rPr lang="en-US" smtClean="0"/>
-              <a:t>4/2/2026</a:t>
+              <a:t>4/3/2026</a:t>
             </a:fld>
             <a:endParaRPr lang="en-US"/>
           </a:p>
@@ -2671,7 +2676,7 @@
           <a:p>
             <a:fld id="{2642D604-5A06-4222-909A-95995939C497}" type="datetimeFigureOut">
               <a:rPr lang="en-US" smtClean="0"/>
-              <a:t>4/2/2026</a:t>
+              <a:t>4/3/2026</a:t>
             </a:fld>
             <a:endParaRPr lang="en-US"/>
           </a:p>
@@ -2912,7 +2917,7 @@
           <a:p>
             <a:fld id="{2642D604-5A06-4222-909A-95995939C497}" type="datetimeFigureOut">
               <a:rPr lang="en-US" smtClean="0"/>
-              <a:t>4/2/2026</a:t>
+              <a:t>4/3/2026</a:t>
             </a:fld>
             <a:endParaRPr lang="en-US"/>
           </a:p>
@@ -3537,6 +3542,711 @@
           <p:cNvPr id="2" name="Title 1">
             <a:extLst>
               <a:ext uri="{FF2B5EF4-FFF2-40B4-BE49-F238E27FC236}">
+                <a16:creationId xmlns:a16="http://schemas.microsoft.com/office/drawing/2014/main" id="{EFEBF398-D5D5-0424-8E18-33DEA4C4A1A0}"/>
+              </a:ext>
+            </a:extLst>
+          </p:cNvPr>
+          <p:cNvSpPr>
+            <a:spLocks noGrp="1"/>
+          </p:cNvSpPr>
+          <p:nvPr>
+            <p:ph type="title"/>
+          </p:nvPr>
+        </p:nvSpPr>
+        <p:spPr/>
+        <p:txBody>
+          <a:bodyPr/>
+          <a:lstStyle/>
+          <a:p>
+            <a:r>
+              <a:rPr lang="en-US" dirty="0"/>
+              <a:t>New results:</a:t>
+            </a:r>
+          </a:p>
+        </p:txBody>
+      </p:sp>
+      <p:pic>
+        <p:nvPicPr>
+          <p:cNvPr id="5" name="Content Placeholder 4">
+            <a:extLst>
+              <a:ext uri="{FF2B5EF4-FFF2-40B4-BE49-F238E27FC236}">
+                <a16:creationId xmlns:a16="http://schemas.microsoft.com/office/drawing/2014/main" id="{B299E2A4-C983-5014-8D3B-E26B049578EC}"/>
+              </a:ext>
+            </a:extLst>
+          </p:cNvPr>
+          <p:cNvPicPr>
+            <a:picLocks noGrp="1" noChangeAspect="1"/>
+          </p:cNvPicPr>
+          <p:nvPr>
+            <p:ph idx="1"/>
+          </p:nvPr>
+        </p:nvPicPr>
+        <p:blipFill>
+          <a:blip r:embed="rId2"/>
+          <a:stretch>
+            <a:fillRect/>
+          </a:stretch>
+        </p:blipFill>
+        <p:spPr>
+          <a:xfrm>
+            <a:off x="418741" y="2491544"/>
+            <a:ext cx="5322308" cy="3309001"/>
+          </a:xfrm>
+          <a:prstGeom prst="rect">
+            <a:avLst/>
+          </a:prstGeom>
+        </p:spPr>
+      </p:pic>
+      <p:pic>
+        <p:nvPicPr>
+          <p:cNvPr id="7" name="Picture 6">
+            <a:extLst>
+              <a:ext uri="{FF2B5EF4-FFF2-40B4-BE49-F238E27FC236}">
+                <a16:creationId xmlns:a16="http://schemas.microsoft.com/office/drawing/2014/main" id="{89A35780-F308-709C-B351-DF2E130529F0}"/>
+              </a:ext>
+            </a:extLst>
+          </p:cNvPr>
+          <p:cNvPicPr>
+            <a:picLocks noChangeAspect="1"/>
+          </p:cNvPicPr>
+          <p:nvPr/>
+        </p:nvPicPr>
+        <p:blipFill>
+          <a:blip r:embed="rId3"/>
+          <a:stretch>
+            <a:fillRect/>
+          </a:stretch>
+        </p:blipFill>
+        <p:spPr>
+          <a:xfrm>
+            <a:off x="6026819" y="2491544"/>
+            <a:ext cx="5242379" cy="3633549"/>
+          </a:xfrm>
+          <a:prstGeom prst="rect">
+            <a:avLst/>
+          </a:prstGeom>
+        </p:spPr>
+      </p:pic>
+      <p:sp>
+        <p:nvSpPr>
+          <p:cNvPr id="8" name="TextBox 7">
+            <a:extLst>
+              <a:ext uri="{FF2B5EF4-FFF2-40B4-BE49-F238E27FC236}">
+                <a16:creationId xmlns:a16="http://schemas.microsoft.com/office/drawing/2014/main" id="{9427BAE1-A22C-1F96-3A08-4F53DBA5CB1F}"/>
+              </a:ext>
+            </a:extLst>
+          </p:cNvPr>
+          <p:cNvSpPr txBox="1"/>
+          <p:nvPr/>
+        </p:nvSpPr>
+        <p:spPr>
+          <a:xfrm>
+            <a:off x="922802" y="1476774"/>
+            <a:ext cx="6757416" cy="923330"/>
+          </a:xfrm>
+          <a:prstGeom prst="rect">
+            <a:avLst/>
+          </a:prstGeom>
+          <a:noFill/>
+        </p:spPr>
+        <p:txBody>
+          <a:bodyPr wrap="square" rtlCol="0">
+            <a:spAutoFit/>
+          </a:bodyPr>
+          <a:lstStyle/>
+          <a:p>
+            <a:pPr marL="285750" indent="-285750">
+              <a:buFont typeface="Arial" panose="020B0604020202020204" pitchFamily="34" charset="0"/>
+              <a:buChar char="•"/>
+            </a:pPr>
+            <a:r>
+              <a:rPr lang="en-US" dirty="0"/>
+              <a:t>Added burn-in</a:t>
+            </a:r>
+          </a:p>
+          <a:p>
+            <a:pPr marL="285750" indent="-285750">
+              <a:buFont typeface="Arial" panose="020B0604020202020204" pitchFamily="34" charset="0"/>
+              <a:buChar char="•"/>
+            </a:pPr>
+            <a:r>
+              <a:rPr lang="en-US" dirty="0"/>
+              <a:t>Changed CLPM specification</a:t>
+            </a:r>
+          </a:p>
+          <a:p>
+            <a:pPr marL="285750" indent="-285750">
+              <a:buFont typeface="Arial" panose="020B0604020202020204" pitchFamily="34" charset="0"/>
+              <a:buChar char="•"/>
+            </a:pPr>
+            <a:r>
+              <a:rPr lang="en-US" dirty="0"/>
+              <a:t>Fixed out-of-fold predictions</a:t>
+            </a:r>
+          </a:p>
+        </p:txBody>
+      </p:sp>
+    </p:spTree>
+    <p:extLst>
+      <p:ext uri="{BB962C8B-B14F-4D97-AF65-F5344CB8AC3E}">
+        <p14:creationId xmlns:p14="http://schemas.microsoft.com/office/powerpoint/2010/main" val="3193991664"/>
+      </p:ext>
+    </p:extLst>
+  </p:cSld>
+  <p:clrMapOvr>
+    <a:masterClrMapping/>
+  </p:clrMapOvr>
+</p:sld>
+</file>
+
+<file path=ppt/slides/slide4.xml><?xml version="1.0" encoding="utf-8"?>
+<p:sld xmlns:a="http://schemas.openxmlformats.org/drawingml/2006/main" xmlns:r="http://schemas.openxmlformats.org/officeDocument/2006/relationships" xmlns:p="http://schemas.openxmlformats.org/presentationml/2006/main">
+  <p:cSld>
+    <p:spTree>
+      <p:nvGrpSpPr>
+        <p:cNvPr id="1" name=""/>
+        <p:cNvGrpSpPr/>
+        <p:nvPr/>
+      </p:nvGrpSpPr>
+      <p:grpSpPr>
+        <a:xfrm>
+          <a:off x="0" y="0"/>
+          <a:ext cx="0" cy="0"/>
+          <a:chOff x="0" y="0"/>
+          <a:chExt cx="0" cy="0"/>
+        </a:xfrm>
+      </p:grpSpPr>
+      <p:sp>
+        <p:nvSpPr>
+          <p:cNvPr id="2" name="Title 1">
+            <a:extLst>
+              <a:ext uri="{FF2B5EF4-FFF2-40B4-BE49-F238E27FC236}">
+                <a16:creationId xmlns:a16="http://schemas.microsoft.com/office/drawing/2014/main" id="{2E1FCAC5-8C28-1403-A69A-3C032CC0CF93}"/>
+              </a:ext>
+            </a:extLst>
+          </p:cNvPr>
+          <p:cNvSpPr>
+            <a:spLocks noGrp="1"/>
+          </p:cNvSpPr>
+          <p:nvPr>
+            <p:ph type="title"/>
+          </p:nvPr>
+        </p:nvSpPr>
+        <p:spPr/>
+        <p:txBody>
+          <a:bodyPr/>
+          <a:lstStyle/>
+          <a:p>
+            <a:r>
+              <a:rPr lang="en-US" dirty="0"/>
+              <a:t>CLPM </a:t>
+            </a:r>
+            <a:r>
+              <a:rPr lang="en-US" dirty="0" err="1"/>
+              <a:t>s.e.</a:t>
+            </a:r>
+            <a:endParaRPr lang="en-US" dirty="0"/>
+          </a:p>
+        </p:txBody>
+      </p:sp>
+      <p:pic>
+        <p:nvPicPr>
+          <p:cNvPr id="5" name="Content Placeholder 4">
+            <a:extLst>
+              <a:ext uri="{FF2B5EF4-FFF2-40B4-BE49-F238E27FC236}">
+                <a16:creationId xmlns:a16="http://schemas.microsoft.com/office/drawing/2014/main" id="{9CF32E04-EF06-080E-2FE6-2FA4CAB7C774}"/>
+              </a:ext>
+            </a:extLst>
+          </p:cNvPr>
+          <p:cNvPicPr>
+            <a:picLocks noGrp="1" noChangeAspect="1"/>
+          </p:cNvPicPr>
+          <p:nvPr>
+            <p:ph idx="1"/>
+          </p:nvPr>
+        </p:nvPicPr>
+        <p:blipFill>
+          <a:blip r:embed="rId2"/>
+          <a:stretch>
+            <a:fillRect/>
+          </a:stretch>
+        </p:blipFill>
+        <p:spPr>
+          <a:xfrm>
+            <a:off x="575483" y="1515835"/>
+            <a:ext cx="5520517" cy="3826329"/>
+          </a:xfrm>
+          <a:prstGeom prst="rect">
+            <a:avLst/>
+          </a:prstGeom>
+        </p:spPr>
+      </p:pic>
+      <p:pic>
+        <p:nvPicPr>
+          <p:cNvPr id="7" name="Picture 6">
+            <a:extLst>
+              <a:ext uri="{FF2B5EF4-FFF2-40B4-BE49-F238E27FC236}">
+                <a16:creationId xmlns:a16="http://schemas.microsoft.com/office/drawing/2014/main" id="{0980C6FF-BEB9-C241-B68A-5D354161EAFA}"/>
+              </a:ext>
+            </a:extLst>
+          </p:cNvPr>
+          <p:cNvPicPr>
+            <a:picLocks noChangeAspect="1"/>
+          </p:cNvPicPr>
+          <p:nvPr/>
+        </p:nvPicPr>
+        <p:blipFill>
+          <a:blip r:embed="rId3"/>
+          <a:stretch>
+            <a:fillRect/>
+          </a:stretch>
+        </p:blipFill>
+        <p:spPr>
+          <a:xfrm>
+            <a:off x="6096000" y="1440615"/>
+            <a:ext cx="5753390" cy="3987736"/>
+          </a:xfrm>
+          <a:prstGeom prst="rect">
+            <a:avLst/>
+          </a:prstGeom>
+        </p:spPr>
+      </p:pic>
+    </p:spTree>
+    <p:extLst>
+      <p:ext uri="{BB962C8B-B14F-4D97-AF65-F5344CB8AC3E}">
+        <p14:creationId xmlns:p14="http://schemas.microsoft.com/office/powerpoint/2010/main" val="3026749920"/>
+      </p:ext>
+    </p:extLst>
+  </p:cSld>
+  <p:clrMapOvr>
+    <a:masterClrMapping/>
+  </p:clrMapOvr>
+</p:sld>
+</file>
+
+<file path=ppt/slides/slide5.xml><?xml version="1.0" encoding="utf-8"?>
+<p:sld xmlns:a="http://schemas.openxmlformats.org/drawingml/2006/main" xmlns:r="http://schemas.openxmlformats.org/officeDocument/2006/relationships" xmlns:p="http://schemas.openxmlformats.org/presentationml/2006/main">
+  <p:cSld>
+    <p:spTree>
+      <p:nvGrpSpPr>
+        <p:cNvPr id="1" name=""/>
+        <p:cNvGrpSpPr/>
+        <p:nvPr/>
+      </p:nvGrpSpPr>
+      <p:grpSpPr>
+        <a:xfrm>
+          <a:off x="0" y="0"/>
+          <a:ext cx="0" cy="0"/>
+          <a:chOff x="0" y="0"/>
+          <a:chExt cx="0" cy="0"/>
+        </a:xfrm>
+      </p:grpSpPr>
+      <p:sp>
+        <p:nvSpPr>
+          <p:cNvPr id="2" name="Title 1">
+            <a:extLst>
+              <a:ext uri="{FF2B5EF4-FFF2-40B4-BE49-F238E27FC236}">
+                <a16:creationId xmlns:a16="http://schemas.microsoft.com/office/drawing/2014/main" id="{BA070D8E-46A6-2CF7-92E9-440B3A0225FF}"/>
+              </a:ext>
+            </a:extLst>
+          </p:cNvPr>
+          <p:cNvSpPr>
+            <a:spLocks noGrp="1"/>
+          </p:cNvSpPr>
+          <p:nvPr>
+            <p:ph type="title"/>
+          </p:nvPr>
+        </p:nvSpPr>
+        <p:spPr/>
+        <p:txBody>
+          <a:bodyPr/>
+          <a:lstStyle/>
+          <a:p>
+            <a:r>
+              <a:rPr lang="en-US" dirty="0"/>
+              <a:t>CLPM vs BCA LM CLPM bias</a:t>
+            </a:r>
+          </a:p>
+        </p:txBody>
+      </p:sp>
+      <p:pic>
+        <p:nvPicPr>
+          <p:cNvPr id="6" name="Content Placeholder 5">
+            <a:extLst>
+              <a:ext uri="{FF2B5EF4-FFF2-40B4-BE49-F238E27FC236}">
+                <a16:creationId xmlns:a16="http://schemas.microsoft.com/office/drawing/2014/main" id="{702CEEA0-F907-183E-D4E4-77D964A70799}"/>
+              </a:ext>
+            </a:extLst>
+          </p:cNvPr>
+          <p:cNvPicPr>
+            <a:picLocks noGrp="1" noChangeAspect="1"/>
+          </p:cNvPicPr>
+          <p:nvPr>
+            <p:ph idx="1"/>
+          </p:nvPr>
+        </p:nvPicPr>
+        <p:blipFill>
+          <a:blip r:embed="rId2"/>
+          <a:stretch>
+            <a:fillRect/>
+          </a:stretch>
+        </p:blipFill>
+        <p:spPr>
+          <a:xfrm>
+            <a:off x="359876" y="1690688"/>
+            <a:ext cx="5511041" cy="3837531"/>
+          </a:xfrm>
+          <a:prstGeom prst="rect">
+            <a:avLst/>
+          </a:prstGeom>
+        </p:spPr>
+      </p:pic>
+      <p:pic>
+        <p:nvPicPr>
+          <p:cNvPr id="9" name="Picture 8">
+            <a:extLst>
+              <a:ext uri="{FF2B5EF4-FFF2-40B4-BE49-F238E27FC236}">
+                <a16:creationId xmlns:a16="http://schemas.microsoft.com/office/drawing/2014/main" id="{060D253E-D531-C4E7-3A1E-39CA9905B69B}"/>
+              </a:ext>
+            </a:extLst>
+          </p:cNvPr>
+          <p:cNvPicPr>
+            <a:picLocks noChangeAspect="1"/>
+          </p:cNvPicPr>
+          <p:nvPr/>
+        </p:nvPicPr>
+        <p:blipFill>
+          <a:blip r:embed="rId3"/>
+          <a:stretch>
+            <a:fillRect/>
+          </a:stretch>
+        </p:blipFill>
+        <p:spPr>
+          <a:xfrm>
+            <a:off x="5870917" y="1782612"/>
+            <a:ext cx="5806777" cy="3384699"/>
+          </a:xfrm>
+          <a:prstGeom prst="rect">
+            <a:avLst/>
+          </a:prstGeom>
+        </p:spPr>
+      </p:pic>
+    </p:spTree>
+    <p:extLst>
+      <p:ext uri="{BB962C8B-B14F-4D97-AF65-F5344CB8AC3E}">
+        <p14:creationId xmlns:p14="http://schemas.microsoft.com/office/powerpoint/2010/main" val="2126381106"/>
+      </p:ext>
+    </p:extLst>
+  </p:cSld>
+  <p:clrMapOvr>
+    <a:masterClrMapping/>
+  </p:clrMapOvr>
+</p:sld>
+</file>
+
+<file path=ppt/slides/slide6.xml><?xml version="1.0" encoding="utf-8"?>
+<p:sld xmlns:a="http://schemas.openxmlformats.org/drawingml/2006/main" xmlns:r="http://schemas.openxmlformats.org/officeDocument/2006/relationships" xmlns:p="http://schemas.openxmlformats.org/presentationml/2006/main">
+  <p:cSld>
+    <p:spTree>
+      <p:nvGrpSpPr>
+        <p:cNvPr id="1" name="">
+          <a:extLst>
+            <a:ext uri="{FF2B5EF4-FFF2-40B4-BE49-F238E27FC236}">
+              <a16:creationId xmlns:a16="http://schemas.microsoft.com/office/drawing/2014/main" id="{9488B2B3-8F08-0602-52BE-1E93EE985EAA}"/>
+            </a:ext>
+          </a:extLst>
+        </p:cNvPr>
+        <p:cNvGrpSpPr/>
+        <p:nvPr/>
+      </p:nvGrpSpPr>
+      <p:grpSpPr>
+        <a:xfrm>
+          <a:off x="0" y="0"/>
+          <a:ext cx="0" cy="0"/>
+          <a:chOff x="0" y="0"/>
+          <a:chExt cx="0" cy="0"/>
+        </a:xfrm>
+      </p:grpSpPr>
+      <p:sp>
+        <p:nvSpPr>
+          <p:cNvPr id="2" name="Title 1">
+            <a:extLst>
+              <a:ext uri="{FF2B5EF4-FFF2-40B4-BE49-F238E27FC236}">
+                <a16:creationId xmlns:a16="http://schemas.microsoft.com/office/drawing/2014/main" id="{A08DF2B6-B467-F08D-F315-8B8461B07D92}"/>
+              </a:ext>
+            </a:extLst>
+          </p:cNvPr>
+          <p:cNvSpPr>
+            <a:spLocks noGrp="1"/>
+          </p:cNvSpPr>
+          <p:nvPr>
+            <p:ph type="title"/>
+          </p:nvPr>
+        </p:nvSpPr>
+        <p:spPr/>
+        <p:txBody>
+          <a:bodyPr/>
+          <a:lstStyle/>
+          <a:p>
+            <a:r>
+              <a:rPr lang="en-US" dirty="0"/>
+              <a:t>CLPM vs BCA LM CLPM </a:t>
+            </a:r>
+            <a:r>
+              <a:rPr lang="en-US" dirty="0" err="1"/>
+              <a:t>s.e.</a:t>
+            </a:r>
+            <a:endParaRPr lang="en-US" dirty="0"/>
+          </a:p>
+        </p:txBody>
+      </p:sp>
+      <p:pic>
+        <p:nvPicPr>
+          <p:cNvPr id="7" name="Picture 6">
+            <a:extLst>
+              <a:ext uri="{FF2B5EF4-FFF2-40B4-BE49-F238E27FC236}">
+                <a16:creationId xmlns:a16="http://schemas.microsoft.com/office/drawing/2014/main" id="{4B1F16D8-4B61-19E5-999F-1150D203BDA1}"/>
+              </a:ext>
+            </a:extLst>
+          </p:cNvPr>
+          <p:cNvPicPr>
+            <a:picLocks noChangeAspect="1"/>
+          </p:cNvPicPr>
+          <p:nvPr/>
+        </p:nvPicPr>
+        <p:blipFill>
+          <a:blip r:embed="rId2"/>
+          <a:stretch>
+            <a:fillRect/>
+          </a:stretch>
+        </p:blipFill>
+        <p:spPr>
+          <a:xfrm>
+            <a:off x="120818" y="2068132"/>
+            <a:ext cx="5731342" cy="3011031"/>
+          </a:xfrm>
+          <a:prstGeom prst="rect">
+            <a:avLst/>
+          </a:prstGeom>
+        </p:spPr>
+      </p:pic>
+      <p:pic>
+        <p:nvPicPr>
+          <p:cNvPr id="10" name="Picture 9">
+            <a:extLst>
+              <a:ext uri="{FF2B5EF4-FFF2-40B4-BE49-F238E27FC236}">
+                <a16:creationId xmlns:a16="http://schemas.microsoft.com/office/drawing/2014/main" id="{BD6E40D2-41D0-EA07-7A79-1A782CBF8BB4}"/>
+              </a:ext>
+            </a:extLst>
+          </p:cNvPr>
+          <p:cNvPicPr>
+            <a:picLocks noChangeAspect="1"/>
+          </p:cNvPicPr>
+          <p:nvPr/>
+        </p:nvPicPr>
+        <p:blipFill>
+          <a:blip r:embed="rId3"/>
+          <a:stretch>
+            <a:fillRect/>
+          </a:stretch>
+        </p:blipFill>
+        <p:spPr>
+          <a:xfrm>
+            <a:off x="5864532" y="2068132"/>
+            <a:ext cx="5731342" cy="2994989"/>
+          </a:xfrm>
+          <a:prstGeom prst="rect">
+            <a:avLst/>
+          </a:prstGeom>
+        </p:spPr>
+      </p:pic>
+    </p:spTree>
+    <p:extLst>
+      <p:ext uri="{BB962C8B-B14F-4D97-AF65-F5344CB8AC3E}">
+        <p14:creationId xmlns:p14="http://schemas.microsoft.com/office/powerpoint/2010/main" val="1881266932"/>
+      </p:ext>
+    </p:extLst>
+  </p:cSld>
+  <p:clrMapOvr>
+    <a:masterClrMapping/>
+  </p:clrMapOvr>
+</p:sld>
+</file>
+
+<file path=ppt/slides/slide7.xml><?xml version="1.0" encoding="utf-8"?>
+<p:sld xmlns:a="http://schemas.openxmlformats.org/drawingml/2006/main" xmlns:r="http://schemas.openxmlformats.org/officeDocument/2006/relationships" xmlns:p="http://schemas.openxmlformats.org/presentationml/2006/main">
+  <p:cSld>
+    <p:spTree>
+      <p:nvGrpSpPr>
+        <p:cNvPr id="1" name=""/>
+        <p:cNvGrpSpPr/>
+        <p:nvPr/>
+      </p:nvGrpSpPr>
+      <p:grpSpPr>
+        <a:xfrm>
+          <a:off x="0" y="0"/>
+          <a:ext cx="0" cy="0"/>
+          <a:chOff x="0" y="0"/>
+          <a:chExt cx="0" cy="0"/>
+        </a:xfrm>
+      </p:grpSpPr>
+      <p:pic>
+        <p:nvPicPr>
+          <p:cNvPr id="5" name="Content Placeholder 4">
+            <a:extLst>
+              <a:ext uri="{FF2B5EF4-FFF2-40B4-BE49-F238E27FC236}">
+                <a16:creationId xmlns:a16="http://schemas.microsoft.com/office/drawing/2014/main" id="{14F68111-6628-FCBC-BDA4-65729BCD9A09}"/>
+              </a:ext>
+            </a:extLst>
+          </p:cNvPr>
+          <p:cNvPicPr>
+            <a:picLocks noGrp="1" noChangeAspect="1"/>
+          </p:cNvPicPr>
+          <p:nvPr>
+            <p:ph idx="1"/>
+          </p:nvPr>
+        </p:nvPicPr>
+        <p:blipFill>
+          <a:blip r:embed="rId2"/>
+          <a:stretch>
+            <a:fillRect/>
+          </a:stretch>
+        </p:blipFill>
+        <p:spPr>
+          <a:xfrm>
+            <a:off x="188784" y="85377"/>
+            <a:ext cx="4498720" cy="3118111"/>
+          </a:xfrm>
+          <a:prstGeom prst="rect">
+            <a:avLst/>
+          </a:prstGeom>
+        </p:spPr>
+      </p:pic>
+      <p:pic>
+        <p:nvPicPr>
+          <p:cNvPr id="7" name="Picture 6">
+            <a:extLst>
+              <a:ext uri="{FF2B5EF4-FFF2-40B4-BE49-F238E27FC236}">
+                <a16:creationId xmlns:a16="http://schemas.microsoft.com/office/drawing/2014/main" id="{23C728F6-55C5-02A9-6A93-8373205E7B7C}"/>
+              </a:ext>
+            </a:extLst>
+          </p:cNvPr>
+          <p:cNvPicPr>
+            <a:picLocks noChangeAspect="1"/>
+          </p:cNvPicPr>
+          <p:nvPr/>
+        </p:nvPicPr>
+        <p:blipFill>
+          <a:blip r:embed="rId3"/>
+          <a:stretch>
+            <a:fillRect/>
+          </a:stretch>
+        </p:blipFill>
+        <p:spPr>
+          <a:xfrm>
+            <a:off x="5377315" y="85377"/>
+            <a:ext cx="4604084" cy="3191139"/>
+          </a:xfrm>
+          <a:prstGeom prst="rect">
+            <a:avLst/>
+          </a:prstGeom>
+        </p:spPr>
+      </p:pic>
+      <p:pic>
+        <p:nvPicPr>
+          <p:cNvPr id="9" name="Picture 8">
+            <a:extLst>
+              <a:ext uri="{FF2B5EF4-FFF2-40B4-BE49-F238E27FC236}">
+                <a16:creationId xmlns:a16="http://schemas.microsoft.com/office/drawing/2014/main" id="{91D08652-D783-016E-115F-7C96EF11F0AF}"/>
+              </a:ext>
+            </a:extLst>
+          </p:cNvPr>
+          <p:cNvPicPr>
+            <a:picLocks noChangeAspect="1"/>
+          </p:cNvPicPr>
+          <p:nvPr/>
+        </p:nvPicPr>
+        <p:blipFill>
+          <a:blip r:embed="rId4"/>
+          <a:stretch>
+            <a:fillRect/>
+          </a:stretch>
+        </p:blipFill>
+        <p:spPr>
+          <a:xfrm>
+            <a:off x="249936" y="3203488"/>
+            <a:ext cx="4782474" cy="3314784"/>
+          </a:xfrm>
+          <a:prstGeom prst="rect">
+            <a:avLst/>
+          </a:prstGeom>
+        </p:spPr>
+      </p:pic>
+      <p:pic>
+        <p:nvPicPr>
+          <p:cNvPr id="11" name="Picture 10">
+            <a:extLst>
+              <a:ext uri="{FF2B5EF4-FFF2-40B4-BE49-F238E27FC236}">
+                <a16:creationId xmlns:a16="http://schemas.microsoft.com/office/drawing/2014/main" id="{64FFB751-96CF-A5D7-2695-BC150B1358DD}"/>
+              </a:ext>
+            </a:extLst>
+          </p:cNvPr>
+          <p:cNvPicPr>
+            <a:picLocks noChangeAspect="1"/>
+          </p:cNvPicPr>
+          <p:nvPr/>
+        </p:nvPicPr>
+        <p:blipFill>
+          <a:blip r:embed="rId5"/>
+          <a:stretch>
+            <a:fillRect/>
+          </a:stretch>
+        </p:blipFill>
+        <p:spPr>
+          <a:xfrm>
+            <a:off x="5489508" y="3276515"/>
+            <a:ext cx="4782473" cy="3314783"/>
+          </a:xfrm>
+          <a:prstGeom prst="rect">
+            <a:avLst/>
+          </a:prstGeom>
+        </p:spPr>
+      </p:pic>
+    </p:spTree>
+    <p:extLst>
+      <p:ext uri="{BB962C8B-B14F-4D97-AF65-F5344CB8AC3E}">
+        <p14:creationId xmlns:p14="http://schemas.microsoft.com/office/powerpoint/2010/main" val="4101426155"/>
+      </p:ext>
+    </p:extLst>
+  </p:cSld>
+  <p:clrMapOvr>
+    <a:masterClrMapping/>
+  </p:clrMapOvr>
+</p:sld>
+</file>
+
+<file path=ppt/slides/slide8.xml><?xml version="1.0" encoding="utf-8"?>
+<p:sld xmlns:a="http://schemas.openxmlformats.org/drawingml/2006/main" xmlns:r="http://schemas.openxmlformats.org/officeDocument/2006/relationships" xmlns:p="http://schemas.openxmlformats.org/presentationml/2006/main">
+  <p:cSld>
+    <p:spTree>
+      <p:nvGrpSpPr>
+        <p:cNvPr id="1" name=""/>
+        <p:cNvGrpSpPr/>
+        <p:nvPr/>
+      </p:nvGrpSpPr>
+      <p:grpSpPr>
+        <a:xfrm>
+          <a:off x="0" y="0"/>
+          <a:ext cx="0" cy="0"/>
+          <a:chOff x="0" y="0"/>
+          <a:chExt cx="0" cy="0"/>
+        </a:xfrm>
+      </p:grpSpPr>
+      <p:sp>
+        <p:nvSpPr>
+          <p:cNvPr id="2" name="Title 1">
+            <a:extLst>
+              <a:ext uri="{FF2B5EF4-FFF2-40B4-BE49-F238E27FC236}">
                 <a16:creationId xmlns:a16="http://schemas.microsoft.com/office/drawing/2014/main" id="{B9D99121-B034-B613-40B0-AE64936E0576}"/>
               </a:ext>
             </a:extLst>
@@ -3555,13 +4265,8 @@
           <a:p>
             <a:r>
               <a:rPr lang="en-US" dirty="0"/>
-              <a:t>Effect </a:t>
-            </a:r>
-            <a:r>
-              <a:rPr lang="en-US"/>
-              <a:t>of burn-in</a:t>
-            </a:r>
-            <a:endParaRPr lang="en-US" dirty="0"/>
+              <a:t>Effect of burn-in for RI-CLPM</a:t>
+            </a:r>
           </a:p>
         </p:txBody>
       </p:sp>
@@ -3610,7 +4315,7 @@
 </p:sld>
 </file>
 
-<file path=ppt/slides/slide4.xml><?xml version="1.0" encoding="utf-8"?>
+<file path=ppt/slides/slide9.xml><?xml version="1.0" encoding="utf-8"?>
 <p:sld xmlns:a="http://schemas.openxmlformats.org/drawingml/2006/main" xmlns:r="http://schemas.openxmlformats.org/officeDocument/2006/relationships" xmlns:p="http://schemas.openxmlformats.org/presentationml/2006/main">
   <p:cSld>
     <p:spTree>
@@ -3650,7 +4355,7 @@
           <a:p>
             <a:r>
               <a:rPr lang="en-US" dirty="0"/>
-              <a:t>RICLPM Burn-in 50 vs 20</a:t>
+              <a:t>RI-CLPM sample sizes (bi 50 vs 20)</a:t>
             </a:r>
           </a:p>
         </p:txBody>
@@ -3681,6 +4386,36 @@
           <a:xfrm>
             <a:off x="838200" y="2125452"/>
             <a:ext cx="5071889" cy="3137182"/>
+          </a:xfrm>
+          <a:prstGeom prst="rect">
+            <a:avLst/>
+          </a:prstGeom>
+        </p:spPr>
+      </p:pic>
+      <p:pic>
+        <p:nvPicPr>
+          <p:cNvPr id="7" name="Picture 6">
+            <a:extLst>
+              <a:ext uri="{FF2B5EF4-FFF2-40B4-BE49-F238E27FC236}">
+                <a16:creationId xmlns:a16="http://schemas.microsoft.com/office/drawing/2014/main" id="{9BC81E7A-D362-C69F-4794-40B399A01347}"/>
+              </a:ext>
+            </a:extLst>
+          </p:cNvPr>
+          <p:cNvPicPr>
+            <a:picLocks noChangeAspect="1"/>
+          </p:cNvPicPr>
+          <p:nvPr/>
+        </p:nvPicPr>
+        <p:blipFill>
+          <a:blip r:embed="rId3"/>
+          <a:stretch>
+            <a:fillRect/>
+          </a:stretch>
+        </p:blipFill>
+        <p:spPr>
+          <a:xfrm>
+            <a:off x="6025267" y="2125452"/>
+            <a:ext cx="5197790" cy="3180049"/>
           </a:xfrm>
           <a:prstGeom prst="rect">
             <a:avLst/>
